--- a/prezentacie/p04w.pptx
+++ b/prezentacie/p04w.pptx
@@ -252,7 +252,7 @@
           <a:p>
             <a:fld id="{10052495-8BC8-4CFB-94B1-B0429F101A0D}" type="datetimeFigureOut">
               <a:rPr lang="sk-SK" smtClean="0"/>
-              <a:t>24. 9. 2025</a:t>
+              <a:t>23. 9. 2026</a:t>
             </a:fld>
             <a:endParaRPr lang="sk-SK"/>
           </a:p>
@@ -422,7 +422,7 @@
           <a:p>
             <a:fld id="{10052495-8BC8-4CFB-94B1-B0429F101A0D}" type="datetimeFigureOut">
               <a:rPr lang="sk-SK" smtClean="0"/>
-              <a:t>24. 9. 2025</a:t>
+              <a:t>23. 9. 2026</a:t>
             </a:fld>
             <a:endParaRPr lang="sk-SK"/>
           </a:p>
@@ -602,7 +602,7 @@
           <a:p>
             <a:fld id="{10052495-8BC8-4CFB-94B1-B0429F101A0D}" type="datetimeFigureOut">
               <a:rPr lang="sk-SK" smtClean="0"/>
-              <a:t>24. 9. 2025</a:t>
+              <a:t>23. 9. 2026</a:t>
             </a:fld>
             <a:endParaRPr lang="sk-SK"/>
           </a:p>
@@ -772,7 +772,7 @@
           <a:p>
             <a:fld id="{10052495-8BC8-4CFB-94B1-B0429F101A0D}" type="datetimeFigureOut">
               <a:rPr lang="sk-SK" smtClean="0"/>
-              <a:t>24. 9. 2025</a:t>
+              <a:t>23. 9. 2026</a:t>
             </a:fld>
             <a:endParaRPr lang="sk-SK"/>
           </a:p>
@@ -1018,7 +1018,7 @@
           <a:p>
             <a:fld id="{10052495-8BC8-4CFB-94B1-B0429F101A0D}" type="datetimeFigureOut">
               <a:rPr lang="sk-SK" smtClean="0"/>
-              <a:t>24. 9. 2025</a:t>
+              <a:t>23. 9. 2026</a:t>
             </a:fld>
             <a:endParaRPr lang="sk-SK"/>
           </a:p>
@@ -1250,7 +1250,7 @@
           <a:p>
             <a:fld id="{10052495-8BC8-4CFB-94B1-B0429F101A0D}" type="datetimeFigureOut">
               <a:rPr lang="sk-SK" smtClean="0"/>
-              <a:t>24. 9. 2025</a:t>
+              <a:t>23. 9. 2026</a:t>
             </a:fld>
             <a:endParaRPr lang="sk-SK"/>
           </a:p>
@@ -1617,7 +1617,7 @@
           <a:p>
             <a:fld id="{10052495-8BC8-4CFB-94B1-B0429F101A0D}" type="datetimeFigureOut">
               <a:rPr lang="sk-SK" smtClean="0"/>
-              <a:t>24. 9. 2025</a:t>
+              <a:t>23. 9. 2026</a:t>
             </a:fld>
             <a:endParaRPr lang="sk-SK"/>
           </a:p>
@@ -1735,7 +1735,7 @@
           <a:p>
             <a:fld id="{10052495-8BC8-4CFB-94B1-B0429F101A0D}" type="datetimeFigureOut">
               <a:rPr lang="sk-SK" smtClean="0"/>
-              <a:t>24. 9. 2025</a:t>
+              <a:t>23. 9. 2026</a:t>
             </a:fld>
             <a:endParaRPr lang="sk-SK"/>
           </a:p>
@@ -1830,7 +1830,7 @@
           <a:p>
             <a:fld id="{10052495-8BC8-4CFB-94B1-B0429F101A0D}" type="datetimeFigureOut">
               <a:rPr lang="sk-SK" smtClean="0"/>
-              <a:t>24. 9. 2025</a:t>
+              <a:t>23. 9. 2026</a:t>
             </a:fld>
             <a:endParaRPr lang="sk-SK"/>
           </a:p>
@@ -2107,7 +2107,7 @@
           <a:p>
             <a:fld id="{10052495-8BC8-4CFB-94B1-B0429F101A0D}" type="datetimeFigureOut">
               <a:rPr lang="sk-SK" smtClean="0"/>
-              <a:t>24. 9. 2025</a:t>
+              <a:t>23. 9. 2026</a:t>
             </a:fld>
             <a:endParaRPr lang="sk-SK"/>
           </a:p>
@@ -2364,7 +2364,7 @@
           <a:p>
             <a:fld id="{10052495-8BC8-4CFB-94B1-B0429F101A0D}" type="datetimeFigureOut">
               <a:rPr lang="sk-SK" smtClean="0"/>
-              <a:t>24. 9. 2025</a:t>
+              <a:t>23. 9. 2026</a:t>
             </a:fld>
             <a:endParaRPr lang="sk-SK"/>
           </a:p>
@@ -2577,7 +2577,7 @@
           <a:p>
             <a:fld id="{10052495-8BC8-4CFB-94B1-B0429F101A0D}" type="datetimeFigureOut">
               <a:rPr lang="sk-SK" smtClean="0"/>
-              <a:t>24. 9. 2025</a:t>
+              <a:t>23. 9. 2026</a:t>
             </a:fld>
             <a:endParaRPr lang="sk-SK"/>
           </a:p>
@@ -3519,7 +3519,15 @@
             </a:br>
             <a:r>
               <a:rPr lang="sk-SK" b="1" dirty="0"/>
-              <a:t>Ing. Jozef Wagner PhD.</a:t>
+              <a:t>Ing. Jozef Wagner</a:t>
+            </a:r>
+            <a:r>
+              <a:rPr lang="en-US" b="1" dirty="0"/>
+              <a:t>,</a:t>
+            </a:r>
+            <a:r>
+              <a:rPr lang="sk-SK" b="1" dirty="0"/>
+              <a:t> PhD.</a:t>
             </a:r>
           </a:p>
           <a:p>
@@ -3637,12 +3645,15 @@
               <a:buNone/>
             </a:pPr>
             <a:r>
-              <a:rPr lang="sk-SK" dirty="0"/>
-              <a:t>Každý balík môže obsahovať </a:t>
-            </a:r>
-            <a:r>
-              <a:rPr lang="sk-SK"/>
-              <a:t>špeciálne súbory</a:t>
+              <a:rPr lang="sk-SK" dirty="0">
+                <a:solidFill>
+                  <a:srgbClr val="FF0000"/>
+                </a:solidFill>
+                <a:highlight>
+                  <a:srgbClr val="00FFFF"/>
+                </a:highlight>
+              </a:rPr>
+              <a:t>Každý balík môže obsahovať špeciálne súbory</a:t>
             </a:r>
           </a:p>
           <a:p>
@@ -3652,7 +3663,14 @@
               </a:spcBef>
               <a:buNone/>
             </a:pPr>
-            <a:endParaRPr lang="sk-SK"/>
+            <a:endParaRPr lang="sk-SK" dirty="0">
+              <a:solidFill>
+                <a:srgbClr val="FF0000"/>
+              </a:solidFill>
+              <a:highlight>
+                <a:srgbClr val="00FFFF"/>
+              </a:highlight>
+            </a:endParaRPr>
           </a:p>
           <a:p>
             <a:pPr marL="0" indent="0">
@@ -3662,11 +3680,21 @@
               <a:buNone/>
             </a:pPr>
             <a:r>
-              <a:rPr lang="sk-SK" dirty="0"/>
+              <a:rPr lang="sk-SK" dirty="0">
+                <a:solidFill>
+                  <a:srgbClr val="FF0000"/>
+                </a:solidFill>
+                <a:highlight>
+                  <a:srgbClr val="00FFFF"/>
+                </a:highlight>
+              </a:rPr>
               <a:t>Špeciálny súbor </a:t>
             </a:r>
             <a:r>
               <a:rPr lang="sk-SK" dirty="0">
+                <a:solidFill>
+                  <a:srgbClr val="FF0000"/>
+                </a:solidFill>
                 <a:highlight>
                   <a:srgbClr val="FFFF00"/>
                 </a:highlight>
@@ -3683,11 +3711,25 @@
               <a:buNone/>
             </a:pPr>
             <a:r>
-              <a:rPr lang="it-IT" sz="2800" dirty="0"/>
+              <a:rPr lang="it-IT" sz="2800" dirty="0">
+                <a:solidFill>
+                  <a:srgbClr val="FF0000"/>
+                </a:solidFill>
+                <a:highlight>
+                  <a:srgbClr val="00FFFF"/>
+                </a:highlight>
+              </a:rPr>
               <a:t>Volá sa pri prvom importe daného balík</a:t>
             </a:r>
             <a:r>
-              <a:rPr lang="sk-SK" sz="2800" dirty="0"/>
+              <a:rPr lang="sk-SK" sz="2800" dirty="0">
+                <a:solidFill>
+                  <a:srgbClr val="FF0000"/>
+                </a:solidFill>
+                <a:highlight>
+                  <a:srgbClr val="00FFFF"/>
+                </a:highlight>
+              </a:rPr>
               <a:t>a</a:t>
             </a:r>
           </a:p>
@@ -3698,7 +3740,14 @@
               </a:spcBef>
               <a:buNone/>
             </a:pPr>
-            <a:endParaRPr lang="sk-SK" dirty="0"/>
+            <a:endParaRPr lang="sk-SK" dirty="0">
+              <a:solidFill>
+                <a:srgbClr val="FF0000"/>
+              </a:solidFill>
+              <a:highlight>
+                <a:srgbClr val="00FFFF"/>
+              </a:highlight>
+            </a:endParaRPr>
           </a:p>
           <a:p>
             <a:pPr marL="0" indent="0">
@@ -3708,11 +3757,21 @@
               <a:buNone/>
             </a:pPr>
             <a:r>
-              <a:rPr lang="sk-SK" dirty="0"/>
+              <a:rPr lang="sk-SK" dirty="0">
+                <a:solidFill>
+                  <a:srgbClr val="FF0000"/>
+                </a:solidFill>
+                <a:highlight>
+                  <a:srgbClr val="00FFFF"/>
+                </a:highlight>
+              </a:rPr>
               <a:t>Špeciálny súbor </a:t>
             </a:r>
             <a:r>
               <a:rPr lang="sk-SK" dirty="0">
+                <a:solidFill>
+                  <a:srgbClr val="FF0000"/>
+                </a:solidFill>
                 <a:highlight>
                   <a:srgbClr val="FFFF00"/>
                 </a:highlight>
@@ -3729,7 +3788,14 @@
               <a:buNone/>
             </a:pPr>
             <a:r>
-              <a:rPr lang="sk-SK" sz="2800" dirty="0"/>
+              <a:rPr lang="sk-SK" sz="2800" dirty="0">
+                <a:solidFill>
+                  <a:srgbClr val="FF0000"/>
+                </a:solidFill>
+                <a:highlight>
+                  <a:srgbClr val="00FFFF"/>
+                </a:highlight>
+              </a:rPr>
               <a:t>Volá sa pri spustení balíka ako programu</a:t>
             </a:r>
           </a:p>
@@ -3741,11 +3807,21 @@
               <a:buNone/>
             </a:pPr>
             <a:r>
-              <a:rPr lang="sk-SK" sz="2800" dirty="0"/>
+              <a:rPr lang="sk-SK" sz="2800" dirty="0">
+                <a:solidFill>
+                  <a:srgbClr val="FF0000"/>
+                </a:solidFill>
+                <a:highlight>
+                  <a:srgbClr val="00FFFF"/>
+                </a:highlight>
+              </a:rPr>
               <a:t>Spúšťa sa pomocou </a:t>
             </a:r>
             <a:r>
               <a:rPr lang="sk-SK" sz="2800" dirty="0" err="1">
+                <a:solidFill>
+                  <a:srgbClr val="FF0000"/>
+                </a:solidFill>
                 <a:highlight>
                   <a:srgbClr val="FFFF00"/>
                 </a:highlight>
@@ -3755,6 +3831,9 @@
             </a:r>
             <a:r>
               <a:rPr lang="sk-SK" sz="2800" dirty="0">
+                <a:solidFill>
+                  <a:srgbClr val="FF0000"/>
+                </a:solidFill>
                 <a:highlight>
                   <a:srgbClr val="FFFF00"/>
                 </a:highlight>
@@ -3764,6 +3843,9 @@
             </a:r>
             <a:r>
               <a:rPr lang="sk-SK" sz="2800" dirty="0" err="1">
+                <a:solidFill>
+                  <a:srgbClr val="FF0000"/>
+                </a:solidFill>
                 <a:highlight>
                   <a:srgbClr val="FFFF00"/>
                 </a:highlight>
@@ -3772,6 +3854,9 @@
               <a:t>balik</a:t>
             </a:r>
             <a:endParaRPr lang="sk-SK" sz="2800" dirty="0">
+              <a:solidFill>
+                <a:srgbClr val="FF0000"/>
+              </a:solidFill>
               <a:highlight>
                 <a:srgbClr val="FFFF00"/>
               </a:highlight>
@@ -3816,7 +3901,14 @@
           <a:lstStyle/>
           <a:p>
             <a:r>
-              <a:rPr lang="sk-SK" dirty="0"/>
+              <a:rPr lang="sk-SK" dirty="0">
+                <a:solidFill>
+                  <a:srgbClr val="FF0000"/>
+                </a:solidFill>
+                <a:highlight>
+                  <a:srgbClr val="00FFFF"/>
+                </a:highlight>
+              </a:rPr>
               <a:t>Špeciálne súbory</a:t>
             </a:r>
           </a:p>
@@ -4475,7 +4567,14 @@
               <a:buNone/>
             </a:pPr>
             <a:r>
-              <a:rPr lang="sk-SK" dirty="0"/>
+              <a:rPr lang="sk-SK" dirty="0">
+                <a:solidFill>
+                  <a:srgbClr val="FF0000"/>
+                </a:solidFill>
+                <a:highlight>
+                  <a:srgbClr val="00FFFF"/>
+                </a:highlight>
+              </a:rPr>
               <a:t>Slúži na organizáciu kódu</a:t>
             </a:r>
           </a:p>
@@ -4487,13 +4586,23 @@
               <a:buNone/>
             </a:pPr>
             <a:r>
-              <a:rPr lang="sk-SK" dirty="0"/>
+              <a:rPr lang="sk-SK" dirty="0">
+                <a:solidFill>
+                  <a:srgbClr val="FF0000"/>
+                </a:solidFill>
+                <a:highlight>
+                  <a:srgbClr val="00FFFF"/>
+                </a:highlight>
+              </a:rPr>
               <a:t>Súbor s príponou </a:t>
             </a:r>
             <a:r>
               <a:rPr lang="sk-SK" dirty="0">
-                <a:highlight>
-                  <a:srgbClr val="FFFF00"/>
+                <a:solidFill>
+                  <a:srgbClr val="FF0000"/>
+                </a:solidFill>
+                <a:highlight>
+                  <a:srgbClr val="00FFFF"/>
                 </a:highlight>
                 <a:latin typeface="Consolas" panose="020B0609020204030204" pitchFamily="49" charset="0"/>
               </a:rPr>
@@ -4501,16 +4610,22 @@
             </a:r>
             <a:r>
               <a:rPr lang="sk-SK" dirty="0" err="1">
-                <a:highlight>
-                  <a:srgbClr val="FFFF00"/>
+                <a:solidFill>
+                  <a:srgbClr val="FF0000"/>
+                </a:solidFill>
+                <a:highlight>
+                  <a:srgbClr val="00FFFF"/>
                 </a:highlight>
                 <a:latin typeface="Consolas" panose="020B0609020204030204" pitchFamily="49" charset="0"/>
               </a:rPr>
               <a:t>py</a:t>
             </a:r>
             <a:endParaRPr lang="sk-SK" dirty="0">
+              <a:solidFill>
+                <a:srgbClr val="FF0000"/>
+              </a:solidFill>
               <a:highlight>
-                <a:srgbClr val="FFFF00"/>
+                <a:srgbClr val="00FFFF"/>
               </a:highlight>
               <a:latin typeface="Consolas" panose="020B0609020204030204" pitchFamily="49" charset="0"/>
             </a:endParaRPr>
@@ -4543,11 +4658,21 @@
               <a:buNone/>
             </a:pPr>
             <a:r>
-              <a:rPr lang="sk-SK" dirty="0"/>
+              <a:rPr lang="sk-SK" dirty="0">
+                <a:solidFill>
+                  <a:srgbClr val="FF0000"/>
+                </a:solidFill>
+                <a:highlight>
+                  <a:srgbClr val="00FFFF"/>
+                </a:highlight>
+              </a:rPr>
               <a:t>Spustenie </a:t>
             </a:r>
             <a:r>
               <a:rPr lang="sk-SK" dirty="0" err="1">
+                <a:solidFill>
+                  <a:srgbClr val="FF0000"/>
+                </a:solidFill>
                 <a:highlight>
                   <a:srgbClr val="FFFF00"/>
                 </a:highlight>
@@ -4557,6 +4682,9 @@
             </a:r>
             <a:r>
               <a:rPr lang="sk-SK" dirty="0">
+                <a:solidFill>
+                  <a:srgbClr val="FF0000"/>
+                </a:solidFill>
                 <a:highlight>
                   <a:srgbClr val="FFFF00"/>
                 </a:highlight>
@@ -4566,6 +4694,9 @@
             </a:r>
             <a:r>
               <a:rPr lang="sk-SK" dirty="0" err="1">
+                <a:solidFill>
+                  <a:srgbClr val="FF0000"/>
+                </a:solidFill>
                 <a:highlight>
                   <a:srgbClr val="FFFF00"/>
                 </a:highlight>
@@ -4574,6 +4705,9 @@
               <a:t>moj_modul</a:t>
             </a:r>
             <a:endParaRPr lang="sk-SK" dirty="0">
+              <a:solidFill>
+                <a:srgbClr val="FF0000"/>
+              </a:solidFill>
               <a:highlight>
                 <a:srgbClr val="FFFF00"/>
               </a:highlight>
@@ -4604,7 +4738,14 @@
           <a:lstStyle/>
           <a:p>
             <a:r>
-              <a:rPr lang="sk-SK" dirty="0"/>
+              <a:rPr lang="sk-SK" dirty="0">
+                <a:solidFill>
+                  <a:srgbClr val="FF0000"/>
+                </a:solidFill>
+                <a:highlight>
+                  <a:srgbClr val="00FFFF"/>
+                </a:highlight>
+              </a:rPr>
               <a:t>Modul</a:t>
             </a:r>
           </a:p>
@@ -4702,9 +4843,27 @@
             </a:pPr>
             <a:r>
               <a:rPr lang="it-IT" dirty="0"/>
-              <a:t>Pri importovaní sa modul spustí a vykoná iba pri prvom importe</a:t>
-            </a:r>
-            <a:endParaRPr lang="sk-SK" dirty="0"/>
+              <a:t>Pri importovaní sa </a:t>
+            </a:r>
+            <a:r>
+              <a:rPr lang="it-IT" dirty="0">
+                <a:solidFill>
+                  <a:srgbClr val="FF0000"/>
+                </a:solidFill>
+                <a:highlight>
+                  <a:srgbClr val="00FFFF"/>
+                </a:highlight>
+              </a:rPr>
+              <a:t>modul spustí a vykoná iba pri prvom importe</a:t>
+            </a:r>
+            <a:endParaRPr lang="sk-SK" dirty="0">
+              <a:solidFill>
+                <a:srgbClr val="FF0000"/>
+              </a:solidFill>
+              <a:highlight>
+                <a:srgbClr val="00FFFF"/>
+              </a:highlight>
+            </a:endParaRPr>
           </a:p>
           <a:p>
             <a:pPr marL="0" indent="0">
@@ -4715,6 +4874,9 @@
             </a:pPr>
             <a:r>
               <a:rPr lang="en-US" dirty="0">
+                <a:solidFill>
+                  <a:srgbClr val="FF0000"/>
+                </a:solidFill>
                 <a:highlight>
                   <a:srgbClr val="FFFF00"/>
                 </a:highlight>
@@ -4732,6 +4894,9 @@
             </a:pPr>
             <a:r>
               <a:rPr lang="en-US" dirty="0">
+                <a:solidFill>
+                  <a:srgbClr val="FF0000"/>
+                </a:solidFill>
                 <a:highlight>
                   <a:srgbClr val="FFFF00"/>
                 </a:highlight>
@@ -4749,6 +4914,9 @@
             </a:pPr>
             <a:r>
               <a:rPr lang="en-US" dirty="0">
+                <a:solidFill>
+                  <a:srgbClr val="FF0000"/>
+                </a:solidFill>
                 <a:highlight>
                   <a:srgbClr val="FFFF00"/>
                 </a:highlight>
@@ -4766,6 +4934,9 @@
             </a:pPr>
             <a:r>
               <a:rPr lang="en-US" dirty="0">
+                <a:solidFill>
+                  <a:srgbClr val="FF0000"/>
+                </a:solidFill>
                 <a:highlight>
                   <a:srgbClr val="FFFF00"/>
                 </a:highlight>
@@ -4774,6 +4945,9 @@
               <a:t>from ... import ... as ..</a:t>
             </a:r>
             <a:endParaRPr lang="sk-SK" dirty="0">
+              <a:solidFill>
+                <a:srgbClr val="FF0000"/>
+              </a:solidFill>
               <a:highlight>
                 <a:srgbClr val="FFFF00"/>
               </a:highlight>
@@ -4804,7 +4978,14 @@
           <a:lstStyle/>
           <a:p>
             <a:r>
-              <a:rPr lang="sk-SK" dirty="0"/>
+              <a:rPr lang="sk-SK" dirty="0">
+                <a:solidFill>
+                  <a:srgbClr val="FF0000"/>
+                </a:solidFill>
+                <a:highlight>
+                  <a:srgbClr val="00FFFF"/>
+                </a:highlight>
+              </a:rPr>
               <a:t>Import modulu</a:t>
             </a:r>
           </a:p>
@@ -4913,11 +5094,21 @@
               <a:buNone/>
             </a:pPr>
             <a:r>
-              <a:rPr lang="sk-SK" dirty="0"/>
+              <a:rPr lang="sk-SK" dirty="0">
+                <a:solidFill>
+                  <a:srgbClr val="FF0000"/>
+                </a:solidFill>
+                <a:highlight>
+                  <a:srgbClr val="00FFFF"/>
+                </a:highlight>
+              </a:rPr>
               <a:t>Špeciálny atribút </a:t>
             </a:r>
             <a:r>
               <a:rPr lang="sk-SK" dirty="0">
+                <a:solidFill>
+                  <a:srgbClr val="FF0000"/>
+                </a:solidFill>
                 <a:highlight>
                   <a:srgbClr val="FFFF00"/>
                 </a:highlight>
@@ -4927,6 +5118,9 @@
             </a:r>
             <a:r>
               <a:rPr lang="sk-SK" dirty="0" err="1">
+                <a:solidFill>
+                  <a:srgbClr val="FF0000"/>
+                </a:solidFill>
                 <a:highlight>
                   <a:srgbClr val="FFFF00"/>
                 </a:highlight>
@@ -4936,6 +5130,9 @@
             </a:r>
             <a:r>
               <a:rPr lang="sk-SK" dirty="0">
+                <a:solidFill>
+                  <a:srgbClr val="FF0000"/>
+                </a:solidFill>
                 <a:highlight>
                   <a:srgbClr val="FFFF00"/>
                 </a:highlight>
@@ -4952,7 +5149,14 @@
               <a:buNone/>
             </a:pPr>
             <a:r>
-              <a:rPr lang="sk-SK" dirty="0"/>
+              <a:rPr lang="sk-SK" dirty="0">
+                <a:solidFill>
+                  <a:srgbClr val="FF0000"/>
+                </a:solidFill>
+                <a:highlight>
+                  <a:srgbClr val="00FFFF"/>
+                </a:highlight>
+              </a:rPr>
               <a:t>Používa sa na rozlíšenie, či modul importujem alebo ho spúšťam</a:t>
             </a:r>
           </a:p>
@@ -4974,6 +5178,9 @@
             </a:pPr>
             <a:r>
               <a:rPr lang="sk-SK" dirty="0" err="1">
+                <a:solidFill>
+                  <a:srgbClr val="FF0000"/>
+                </a:solidFill>
                 <a:highlight>
                   <a:srgbClr val="FFFF00"/>
                 </a:highlight>
@@ -4983,6 +5190,9 @@
             </a:r>
             <a:r>
               <a:rPr lang="sk-SK" dirty="0">
+                <a:solidFill>
+                  <a:srgbClr val="FF0000"/>
+                </a:solidFill>
                 <a:highlight>
                   <a:srgbClr val="FFFF00"/>
                 </a:highlight>
@@ -4992,6 +5202,9 @@
             </a:r>
             <a:r>
               <a:rPr lang="sk-SK" dirty="0" err="1">
+                <a:solidFill>
+                  <a:srgbClr val="FF0000"/>
+                </a:solidFill>
                 <a:highlight>
                   <a:srgbClr val="FFFF00"/>
                 </a:highlight>
@@ -5001,6 +5214,9 @@
             </a:r>
             <a:r>
               <a:rPr lang="sk-SK" dirty="0">
+                <a:solidFill>
+                  <a:srgbClr val="FF0000"/>
+                </a:solidFill>
                 <a:highlight>
                   <a:srgbClr val="FFFF00"/>
                 </a:highlight>
@@ -5010,6 +5226,9 @@
             </a:r>
             <a:r>
               <a:rPr lang="sk-SK" dirty="0" err="1">
+                <a:solidFill>
+                  <a:srgbClr val="FF0000"/>
+                </a:solidFill>
                 <a:highlight>
                   <a:srgbClr val="FFFF00"/>
                 </a:highlight>
@@ -5019,6 +5238,9 @@
             </a:r>
             <a:r>
               <a:rPr lang="sk-SK" dirty="0">
+                <a:solidFill>
+                  <a:srgbClr val="FF0000"/>
+                </a:solidFill>
                 <a:highlight>
                   <a:srgbClr val="FFFF00"/>
                 </a:highlight>
@@ -5028,6 +5250,9 @@
             </a:r>
             <a:r>
               <a:rPr lang="sk-SK" dirty="0" err="1">
+                <a:solidFill>
+                  <a:srgbClr val="FF0000"/>
+                </a:solidFill>
                 <a:highlight>
                   <a:srgbClr val="FFFF00"/>
                 </a:highlight>
@@ -5037,6 +5262,9 @@
             </a:r>
             <a:r>
               <a:rPr lang="sk-SK" dirty="0">
+                <a:solidFill>
+                  <a:srgbClr val="FF0000"/>
+                </a:solidFill>
                 <a:highlight>
                   <a:srgbClr val="FFFF00"/>
                 </a:highlight>
@@ -5078,15 +5306,36 @@
           <a:lstStyle/>
           <a:p>
             <a:r>
-              <a:rPr lang="sk-SK" dirty="0"/>
+              <a:rPr lang="sk-SK" dirty="0">
+                <a:solidFill>
+                  <a:srgbClr val="FF0000"/>
+                </a:solidFill>
+                <a:highlight>
+                  <a:srgbClr val="00FFFF"/>
+                </a:highlight>
+              </a:rPr>
               <a:t>__</a:t>
             </a:r>
             <a:r>
-              <a:rPr lang="sk-SK" dirty="0" err="1"/>
+              <a:rPr lang="sk-SK" dirty="0" err="1">
+                <a:solidFill>
+                  <a:srgbClr val="FF0000"/>
+                </a:solidFill>
+                <a:highlight>
+                  <a:srgbClr val="00FFFF"/>
+                </a:highlight>
+              </a:rPr>
               <a:t>name</a:t>
             </a:r>
             <a:r>
-              <a:rPr lang="sk-SK" dirty="0"/>
+              <a:rPr lang="sk-SK" dirty="0">
+                <a:solidFill>
+                  <a:srgbClr val="FF0000"/>
+                </a:solidFill>
+                <a:highlight>
+                  <a:srgbClr val="00FFFF"/>
+                </a:highlight>
+              </a:rPr>
               <a:t>__</a:t>
             </a:r>
           </a:p>
@@ -5310,7 +5559,14 @@
               <a:buNone/>
             </a:pPr>
             <a:r>
-              <a:rPr lang="sk-SK" dirty="0"/>
+              <a:rPr lang="sk-SK" dirty="0">
+                <a:solidFill>
+                  <a:srgbClr val="FF0000"/>
+                </a:solidFill>
+                <a:highlight>
+                  <a:srgbClr val="00FFFF"/>
+                </a:highlight>
+              </a:rPr>
               <a:t>Je to adresár s modulmi</a:t>
             </a:r>
           </a:p>
@@ -5322,7 +5578,14 @@
               <a:buNone/>
             </a:pPr>
             <a:r>
-              <a:rPr lang="sk-SK" dirty="0"/>
+              <a:rPr lang="sk-SK" dirty="0">
+                <a:solidFill>
+                  <a:srgbClr val="FF0000"/>
+                </a:solidFill>
+                <a:highlight>
+                  <a:srgbClr val="00FFFF"/>
+                </a:highlight>
+              </a:rPr>
               <a:t>Názov balíka je názov adresára</a:t>
             </a:r>
           </a:p>
@@ -5358,12 +5621,22 @@
               <a:buNone/>
             </a:pPr>
             <a:r>
-              <a:rPr lang="sk-SK" dirty="0"/>
+              <a:rPr lang="sk-SK" dirty="0">
+                <a:solidFill>
+                  <a:srgbClr val="FF0000"/>
+                </a:solidFill>
+                <a:highlight>
+                  <a:srgbClr val="00FFFF"/>
+                </a:highlight>
+              </a:rPr>
               <a:t>Názvy balíkov a modulu oddelíme bodkou</a:t>
             </a:r>
             <a:endParaRPr lang="sk-SK" dirty="0">
+              <a:solidFill>
+                <a:srgbClr val="FF0000"/>
+              </a:solidFill>
               <a:highlight>
-                <a:srgbClr val="FFFF00"/>
+                <a:srgbClr val="00FFFF"/>
               </a:highlight>
               <a:latin typeface="Consolas" panose="020B0609020204030204" pitchFamily="49" charset="0"/>
             </a:endParaRPr>
@@ -5392,14 +5665,35 @@
           <a:lstStyle/>
           <a:p>
             <a:r>
-              <a:rPr lang="sk-SK" dirty="0"/>
+              <a:rPr lang="sk-SK" dirty="0">
+                <a:solidFill>
+                  <a:srgbClr val="FF0000"/>
+                </a:solidFill>
+                <a:highlight>
+                  <a:srgbClr val="00FFFF"/>
+                </a:highlight>
+              </a:rPr>
               <a:t>Balík - </a:t>
             </a:r>
             <a:r>
-              <a:rPr lang="sk-SK" dirty="0" err="1"/>
+              <a:rPr lang="sk-SK" dirty="0" err="1">
+                <a:solidFill>
+                  <a:srgbClr val="FF0000"/>
+                </a:solidFill>
+                <a:highlight>
+                  <a:srgbClr val="00FFFF"/>
+                </a:highlight>
+              </a:rPr>
               <a:t>package</a:t>
             </a:r>
-            <a:endParaRPr lang="sk-SK" dirty="0"/>
+            <a:endParaRPr lang="sk-SK" dirty="0">
+              <a:solidFill>
+                <a:srgbClr val="FF0000"/>
+              </a:solidFill>
+              <a:highlight>
+                <a:srgbClr val="00FFFF"/>
+              </a:highlight>
+            </a:endParaRPr>
           </a:p>
         </p:txBody>
       </p:sp>
@@ -5779,11 +6073,25 @@
               <a:buNone/>
             </a:pPr>
             <a:r>
-              <a:rPr lang="sk-SK" b="1" dirty="0"/>
+              <a:rPr lang="sk-SK" b="1" dirty="0">
+                <a:solidFill>
+                  <a:srgbClr val="FF0000"/>
+                </a:solidFill>
+                <a:highlight>
+                  <a:srgbClr val="00FFFF"/>
+                </a:highlight>
+              </a:rPr>
               <a:t>Absolútny import</a:t>
             </a:r>
             <a:r>
-              <a:rPr lang="sk-SK" dirty="0"/>
+              <a:rPr lang="sk-SK" dirty="0">
+                <a:solidFill>
+                  <a:srgbClr val="FF0000"/>
+                </a:solidFill>
+                <a:highlight>
+                  <a:srgbClr val="00FFFF"/>
+                </a:highlight>
+              </a:rPr>
               <a:t> - plná cesta, bez úvodnej bodky</a:t>
             </a:r>
           </a:p>
@@ -5795,11 +6103,25 @@
               <a:buNone/>
             </a:pPr>
             <a:r>
-              <a:rPr lang="sk-SK" b="1" dirty="0"/>
+              <a:rPr lang="sk-SK" b="1" dirty="0">
+                <a:solidFill>
+                  <a:srgbClr val="FF0000"/>
+                </a:solidFill>
+                <a:highlight>
+                  <a:srgbClr val="00FFFF"/>
+                </a:highlight>
+              </a:rPr>
               <a:t>Relatívny import</a:t>
             </a:r>
             <a:r>
-              <a:rPr lang="sk-SK" dirty="0"/>
+              <a:rPr lang="sk-SK" dirty="0">
+                <a:solidFill>
+                  <a:srgbClr val="FF0000"/>
+                </a:solidFill>
+                <a:highlight>
+                  <a:srgbClr val="00FFFF"/>
+                </a:highlight>
+              </a:rPr>
               <a:t> - začína bodkou, hľadá sa od aktuálneho balíka/adresára</a:t>
             </a:r>
           </a:p>
